--- a/PMO Agent Skill 解决方案售前材料.pptx
+++ b/PMO Agent Skill 解决方案售前材料.pptx
@@ -2262,6 +2262,10 @@
           </a:solidFill>
           <a:ln/>
         </p:spPr>
+        <p:txBody>
+          <a:bodyPr/>
+          <a:p/>
+        </p:txBody>
       </p:sp>
       <p:sp>
         <p:nvSpPr>
@@ -2328,6 +2332,10 @@
             </a:outerShdw>
           </a:effectLst>
         </p:spPr>
+        <p:txBody>
+          <a:bodyPr/>
+          <a:p/>
+        </p:txBody>
       </p:sp>
       <p:sp>
         <p:nvSpPr>
@@ -2348,6 +2356,10 @@
           </a:solidFill>
           <a:ln/>
         </p:spPr>
+        <p:txBody>
+          <a:bodyPr/>
+          <a:p/>
+        </p:txBody>
       </p:sp>
       <p:sp>
         <p:nvSpPr>
@@ -2446,6 +2458,10 @@
           </a:solidFill>
           <a:ln/>
         </p:spPr>
+        <p:txBody>
+          <a:bodyPr/>
+          <a:p/>
+        </p:txBody>
       </p:sp>
       <p:sp>
         <p:nvSpPr>
@@ -2568,6 +2584,10 @@
             </a:outerShdw>
           </a:effectLst>
         </p:spPr>
+        <p:txBody>
+          <a:bodyPr/>
+          <a:p/>
+        </p:txBody>
       </p:sp>
       <p:sp>
         <p:nvSpPr>
@@ -2588,6 +2608,10 @@
           </a:solidFill>
           <a:ln/>
         </p:spPr>
+        <p:txBody>
+          <a:bodyPr/>
+          <a:p/>
+        </p:txBody>
       </p:sp>
       <p:sp>
         <p:nvSpPr>
@@ -2686,6 +2710,10 @@
           </a:solidFill>
           <a:ln/>
         </p:spPr>
+        <p:txBody>
+          <a:bodyPr/>
+          <a:p/>
+        </p:txBody>
       </p:sp>
       <p:sp>
         <p:nvSpPr>
@@ -2808,6 +2836,10 @@
             </a:outerShdw>
           </a:effectLst>
         </p:spPr>
+        <p:txBody>
+          <a:bodyPr/>
+          <a:p/>
+        </p:txBody>
       </p:sp>
       <p:sp>
         <p:nvSpPr>
@@ -2828,6 +2860,10 @@
           </a:solidFill>
           <a:ln/>
         </p:spPr>
+        <p:txBody>
+          <a:bodyPr/>
+          <a:p/>
+        </p:txBody>
       </p:sp>
       <p:sp>
         <p:nvSpPr>
@@ -2926,6 +2962,10 @@
           </a:solidFill>
           <a:ln/>
         </p:spPr>
+        <p:txBody>
+          <a:bodyPr/>
+          <a:p/>
+        </p:txBody>
       </p:sp>
       <p:sp>
         <p:nvSpPr>
@@ -3048,6 +3088,10 @@
             </a:outerShdw>
           </a:effectLst>
         </p:spPr>
+        <p:txBody>
+          <a:bodyPr/>
+          <a:p/>
+        </p:txBody>
       </p:sp>
       <p:sp>
         <p:nvSpPr>
@@ -3068,6 +3112,10 @@
           </a:solidFill>
           <a:ln/>
         </p:spPr>
+        <p:txBody>
+          <a:bodyPr/>
+          <a:p/>
+        </p:txBody>
       </p:sp>
       <p:sp>
         <p:nvSpPr>
@@ -3166,6 +3214,10 @@
           </a:solidFill>
           <a:ln/>
         </p:spPr>
+        <p:txBody>
+          <a:bodyPr/>
+          <a:p/>
+        </p:txBody>
       </p:sp>
       <p:sp>
         <p:nvSpPr>
@@ -3325,6 +3377,10 @@
             <a:prstDash val="solid"/>
           </a:ln>
         </p:spPr>
+        <p:txBody>
+          <a:bodyPr/>
+          <a:p/>
+        </p:txBody>
       </p:sp>
       <p:sp>
         <p:nvSpPr>
@@ -3345,6 +3401,10 @@
           </a:solidFill>
           <a:ln/>
         </p:spPr>
+        <p:txBody>
+          <a:bodyPr/>
+          <a:p/>
+        </p:txBody>
       </p:sp>
       <p:sp>
         <p:nvSpPr>
@@ -3487,6 +3547,10 @@
             <a:prstDash val="solid"/>
           </a:ln>
         </p:spPr>
+        <p:txBody>
+          <a:bodyPr/>
+          <a:p/>
+        </p:txBody>
       </p:sp>
       <p:sp>
         <p:nvSpPr>
@@ -3507,6 +3571,10 @@
           </a:solidFill>
           <a:ln/>
         </p:spPr>
+        <p:txBody>
+          <a:bodyPr/>
+          <a:p/>
+        </p:txBody>
       </p:sp>
       <p:sp>
         <p:nvSpPr>
@@ -3649,6 +3717,10 @@
             <a:prstDash val="solid"/>
           </a:ln>
         </p:spPr>
+        <p:txBody>
+          <a:bodyPr/>
+          <a:p/>
+        </p:txBody>
       </p:sp>
       <p:sp>
         <p:nvSpPr>
@@ -3669,6 +3741,10 @@
           </a:solidFill>
           <a:ln/>
         </p:spPr>
+        <p:txBody>
+          <a:bodyPr/>
+          <a:p/>
+        </p:txBody>
       </p:sp>
       <p:sp>
         <p:nvSpPr>
@@ -3811,6 +3887,10 @@
             <a:prstDash val="solid"/>
           </a:ln>
         </p:spPr>
+        <p:txBody>
+          <a:bodyPr/>
+          <a:p/>
+        </p:txBody>
       </p:sp>
       <p:sp>
         <p:nvSpPr>
@@ -3831,6 +3911,10 @@
           </a:solidFill>
           <a:ln/>
         </p:spPr>
+        <p:txBody>
+          <a:bodyPr/>
+          <a:p/>
+        </p:txBody>
       </p:sp>
       <p:sp>
         <p:nvSpPr>
@@ -3973,6 +4057,10 @@
             <a:prstDash val="solid"/>
           </a:ln>
         </p:spPr>
+        <p:txBody>
+          <a:bodyPr/>
+          <a:p/>
+        </p:txBody>
       </p:sp>
       <p:sp>
         <p:nvSpPr>
@@ -3993,6 +4081,10 @@
           </a:solidFill>
           <a:ln/>
         </p:spPr>
+        <p:txBody>
+          <a:bodyPr/>
+          <a:p/>
+        </p:txBody>
       </p:sp>
       <p:sp>
         <p:nvSpPr>
@@ -4135,6 +4227,10 @@
             <a:prstDash val="solid"/>
           </a:ln>
         </p:spPr>
+        <p:txBody>
+          <a:bodyPr/>
+          <a:p/>
+        </p:txBody>
       </p:sp>
       <p:sp>
         <p:nvSpPr>
@@ -4155,6 +4251,10 @@
           </a:solidFill>
           <a:ln/>
         </p:spPr>
+        <p:txBody>
+          <a:bodyPr/>
+          <a:p/>
+        </p:txBody>
       </p:sp>
       <p:sp>
         <p:nvSpPr>
@@ -4297,6 +4397,10 @@
             <a:prstDash val="solid"/>
           </a:ln>
         </p:spPr>
+        <p:txBody>
+          <a:bodyPr/>
+          <a:p/>
+        </p:txBody>
       </p:sp>
       <p:sp>
         <p:nvSpPr>
@@ -4317,6 +4421,10 @@
           </a:solidFill>
           <a:ln/>
         </p:spPr>
+        <p:txBody>
+          <a:bodyPr/>
+          <a:p/>
+        </p:txBody>
       </p:sp>
       <p:sp>
         <p:nvSpPr>
@@ -4459,6 +4567,10 @@
             <a:prstDash val="solid"/>
           </a:ln>
         </p:spPr>
+        <p:txBody>
+          <a:bodyPr/>
+          <a:p/>
+        </p:txBody>
       </p:sp>
       <p:sp>
         <p:nvSpPr>
@@ -4479,6 +4591,10 @@
           </a:solidFill>
           <a:ln/>
         </p:spPr>
+        <p:txBody>
+          <a:bodyPr/>
+          <a:p/>
+        </p:txBody>
       </p:sp>
       <p:sp>
         <p:nvSpPr>
@@ -5259,7 +5375,7 @@
                 <a:ea typeface="Microsoft YaHei" pitchFamily="34" charset="-122"/>
                 <a:cs typeface="Microsoft YaHei" pitchFamily="34" charset="-120"/>
               </a:rPr>
-              <a:t>30个原子Skill  ·  挣值/风险/报告/纪要/变更/配置/评审/合规/供应商/收尾...</a:t>
+              <a:t>37个原子Skill  ·  挣值/风险/报告/纪要/变更/配置/评审/合规/供应商/收尾...</a:t>
             </a:r>
             <a:endParaRPr lang="en-US" sz="1100" dirty="0"/>
           </a:p>
@@ -5298,7 +5414,7 @@
                 <a:ea typeface="Microsoft YaHei" pitchFamily="34" charset="-122"/>
                 <a:cs typeface="Microsoft YaHei" pitchFamily="34" charset="-120"/>
               </a:rPr>
-              <a:t>30个原子Skill：独立能力单元，可组合调用</a:t>
+              <a:t>37个原子Skill：独立能力单元，可组合调用</a:t>
             </a:r>
             <a:endParaRPr lang="en-US" sz="1000" dirty="0"/>
           </a:p>
@@ -5376,9 +5492,9 @@
                 <a:ea typeface="Microsoft YaHei" pitchFamily="34" charset="-122"/>
                 <a:cs typeface="Microsoft YaHei" pitchFamily="34" charset="-120"/>
               </a:rPr>
-              <a:t>✓ 四章节规范覆盖率 100%（36/36 Skill）
-✓ 验收测试通过率 100%（67/67用例）
-✓ Skill质量评级：B级35个 / C级1个</a:t>
+              <a:t>✓ 四章节规范覆盖率 100%（37/37 Skill）
+✓ 验收测试通过率 100%（74/74用例）
+✓ Skill质量评级：B级35个 / C级2个</a:t>
             </a:r>
             <a:endParaRPr lang="en-US" sz="1000" dirty="0"/>
           </a:p>
@@ -5486,6 +5602,10 @@
           </a:solidFill>
           <a:ln/>
         </p:spPr>
+        <p:txBody>
+          <a:bodyPr/>
+          <a:p/>
+        </p:txBody>
       </p:sp>
       <p:sp>
         <p:nvSpPr>
@@ -5545,6 +5665,10 @@
           </a:solidFill>
           <a:ln/>
         </p:spPr>
+        <p:txBody>
+          <a:bodyPr/>
+          <a:p/>
+        </p:txBody>
       </p:sp>
       <p:sp>
         <p:nvSpPr>
@@ -5565,6 +5689,10 @@
           </a:solidFill>
           <a:ln/>
         </p:spPr>
+        <p:txBody>
+          <a:bodyPr/>
+          <a:p/>
+        </p:txBody>
       </p:sp>
       <p:sp>
         <p:nvSpPr>
@@ -5832,6 +5960,10 @@
           </a:solidFill>
           <a:ln/>
         </p:spPr>
+        <p:txBody>
+          <a:bodyPr/>
+          <a:p/>
+        </p:txBody>
       </p:sp>
       <p:sp>
         <p:nvSpPr>
@@ -5852,6 +5984,10 @@
           </a:solidFill>
           <a:ln/>
         </p:spPr>
+        <p:txBody>
+          <a:bodyPr/>
+          <a:p/>
+        </p:txBody>
       </p:sp>
       <p:sp>
         <p:nvSpPr>
@@ -5989,6 +6125,10 @@
           </a:solidFill>
           <a:ln/>
         </p:spPr>
+        <p:txBody>
+          <a:bodyPr/>
+          <a:p/>
+        </p:txBody>
       </p:sp>
       <p:sp>
         <p:nvSpPr>
@@ -6009,6 +6149,10 @@
           </a:solidFill>
           <a:ln/>
         </p:spPr>
+        <p:txBody>
+          <a:bodyPr/>
+          <a:p/>
+        </p:txBody>
       </p:sp>
       <p:sp>
         <p:nvSpPr>
@@ -6146,6 +6290,10 @@
           </a:solidFill>
           <a:ln/>
         </p:spPr>
+        <p:txBody>
+          <a:bodyPr/>
+          <a:p/>
+        </p:txBody>
       </p:sp>
       <p:sp>
         <p:nvSpPr>
@@ -6166,6 +6314,10 @@
           </a:solidFill>
           <a:ln/>
         </p:spPr>
+        <p:txBody>
+          <a:bodyPr/>
+          <a:p/>
+        </p:txBody>
       </p:sp>
       <p:sp>
         <p:nvSpPr>
@@ -6303,6 +6455,10 @@
           </a:solidFill>
           <a:ln/>
         </p:spPr>
+        <p:txBody>
+          <a:bodyPr/>
+          <a:p/>
+        </p:txBody>
       </p:sp>
       <p:sp>
         <p:nvSpPr>
@@ -6323,6 +6479,10 @@
           </a:solidFill>
           <a:ln/>
         </p:spPr>
+        <p:txBody>
+          <a:bodyPr/>
+          <a:p/>
+        </p:txBody>
       </p:sp>
       <p:sp>
         <p:nvSpPr>
@@ -6460,6 +6620,10 @@
           </a:solidFill>
           <a:ln/>
         </p:spPr>
+        <p:txBody>
+          <a:bodyPr/>
+          <a:p/>
+        </p:txBody>
       </p:sp>
       <p:sp>
         <p:nvSpPr>
@@ -6480,6 +6644,10 @@
           </a:solidFill>
           <a:ln/>
         </p:spPr>
+        <p:txBody>
+          <a:bodyPr/>
+          <a:p/>
+        </p:txBody>
       </p:sp>
       <p:sp>
         <p:nvSpPr>
@@ -6617,6 +6785,10 @@
           </a:solidFill>
           <a:ln/>
         </p:spPr>
+        <p:txBody>
+          <a:bodyPr/>
+          <a:p/>
+        </p:txBody>
       </p:sp>
       <p:sp>
         <p:nvSpPr>
@@ -6708,6 +6880,10 @@
           </a:solidFill>
           <a:ln/>
         </p:spPr>
+        <p:txBody>
+          <a:bodyPr/>
+          <a:p/>
+        </p:txBody>
       </p:sp>
       <p:sp>
         <p:nvSpPr>
@@ -6767,6 +6943,10 @@
           </a:solidFill>
           <a:ln/>
         </p:spPr>
+        <p:txBody>
+          <a:bodyPr/>
+          <a:p/>
+        </p:txBody>
       </p:sp>
       <p:sp>
         <p:nvSpPr>
@@ -6826,6 +7006,10 @@
           </a:solidFill>
           <a:ln/>
         </p:spPr>
+        <p:txBody>
+          <a:bodyPr/>
+          <a:p/>
+        </p:txBody>
       </p:sp>
       <p:sp>
         <p:nvSpPr>
@@ -6966,6 +7150,10 @@
             <a:prstDash val="solid"/>
           </a:ln>
         </p:spPr>
+        <p:txBody>
+          <a:bodyPr/>
+          <a:p/>
+        </p:txBody>
       </p:sp>
       <p:sp>
         <p:nvSpPr>
@@ -6986,6 +7174,10 @@
           </a:solidFill>
           <a:ln/>
         </p:spPr>
+        <p:txBody>
+          <a:bodyPr/>
+          <a:p/>
+        </p:txBody>
       </p:sp>
       <p:sp>
         <p:nvSpPr>
@@ -7126,6 +7318,10 @@
             <a:prstDash val="solid"/>
           </a:ln>
         </p:spPr>
+        <p:txBody>
+          <a:bodyPr/>
+          <a:p/>
+        </p:txBody>
       </p:sp>
       <p:sp>
         <p:nvSpPr>
@@ -7146,6 +7342,10 @@
           </a:solidFill>
           <a:ln/>
         </p:spPr>
+        <p:txBody>
+          <a:bodyPr/>
+          <a:p/>
+        </p:txBody>
       </p:sp>
       <p:sp>
         <p:nvSpPr>
@@ -7286,6 +7486,10 @@
             <a:prstDash val="solid"/>
           </a:ln>
         </p:spPr>
+        <p:txBody>
+          <a:bodyPr/>
+          <a:p/>
+        </p:txBody>
       </p:sp>
       <p:sp>
         <p:nvSpPr>
@@ -7306,6 +7510,10 @@
           </a:solidFill>
           <a:ln/>
         </p:spPr>
+        <p:txBody>
+          <a:bodyPr/>
+          <a:p/>
+        </p:txBody>
       </p:sp>
       <p:sp>
         <p:nvSpPr>
@@ -7446,6 +7654,10 @@
             <a:prstDash val="solid"/>
           </a:ln>
         </p:spPr>
+        <p:txBody>
+          <a:bodyPr/>
+          <a:p/>
+        </p:txBody>
       </p:sp>
       <p:sp>
         <p:nvSpPr>
@@ -7466,6 +7678,10 @@
           </a:solidFill>
           <a:ln/>
         </p:spPr>
+        <p:txBody>
+          <a:bodyPr/>
+          <a:p/>
+        </p:txBody>
       </p:sp>
       <p:sp>
         <p:nvSpPr>
@@ -7603,6 +7819,10 @@
           </a:solidFill>
           <a:ln/>
         </p:spPr>
+        <p:txBody>
+          <a:bodyPr/>
+          <a:p/>
+        </p:txBody>
       </p:sp>
       <p:sp>
         <p:nvSpPr>
@@ -7662,6 +7882,10 @@
           </a:solidFill>
           <a:ln/>
         </p:spPr>
+        <p:txBody>
+          <a:bodyPr/>
+          <a:p/>
+        </p:txBody>
       </p:sp>
       <p:sp>
         <p:nvSpPr>
@@ -7802,6 +8026,10 @@
             <a:prstDash val="solid"/>
           </a:ln>
         </p:spPr>
+        <p:txBody>
+          <a:bodyPr/>
+          <a:p/>
+        </p:txBody>
       </p:sp>
       <p:sp>
         <p:nvSpPr>
@@ -7822,6 +8050,10 @@
           </a:solidFill>
           <a:ln/>
         </p:spPr>
+        <p:txBody>
+          <a:bodyPr/>
+          <a:p/>
+        </p:txBody>
       </p:sp>
       <p:sp>
         <p:nvSpPr>
@@ -7962,6 +8194,10 @@
             <a:prstDash val="solid"/>
           </a:ln>
         </p:spPr>
+        <p:txBody>
+          <a:bodyPr/>
+          <a:p/>
+        </p:txBody>
       </p:sp>
       <p:sp>
         <p:nvSpPr>
@@ -7982,6 +8218,10 @@
           </a:solidFill>
           <a:ln/>
         </p:spPr>
+        <p:txBody>
+          <a:bodyPr/>
+          <a:p/>
+        </p:txBody>
       </p:sp>
       <p:sp>
         <p:nvSpPr>
@@ -8122,6 +8362,10 @@
             <a:prstDash val="solid"/>
           </a:ln>
         </p:spPr>
+        <p:txBody>
+          <a:bodyPr/>
+          <a:p/>
+        </p:txBody>
       </p:sp>
       <p:sp>
         <p:nvSpPr>
@@ -8142,6 +8386,10 @@
           </a:solidFill>
           <a:ln/>
         </p:spPr>
+        <p:txBody>
+          <a:bodyPr/>
+          <a:p/>
+        </p:txBody>
       </p:sp>
       <p:sp>
         <p:nvSpPr>
@@ -8318,6 +8566,10 @@
           </a:solidFill>
           <a:ln/>
         </p:spPr>
+        <p:txBody>
+          <a:bodyPr/>
+          <a:p/>
+        </p:txBody>
       </p:sp>
       <p:sp>
         <p:nvSpPr>
@@ -8338,6 +8590,10 @@
           </a:solidFill>
           <a:ln/>
         </p:spPr>
+        <p:txBody>
+          <a:bodyPr/>
+          <a:p/>
+        </p:txBody>
       </p:sp>
       <p:sp>
         <p:nvSpPr>
@@ -8436,6 +8692,10 @@
           </a:solidFill>
           <a:ln/>
         </p:spPr>
+        <p:txBody>
+          <a:bodyPr/>
+          <a:p/>
+        </p:txBody>
       </p:sp>
       <p:sp>
         <p:nvSpPr>
@@ -8456,6 +8716,10 @@
           </a:solidFill>
           <a:ln/>
         </p:spPr>
+        <p:txBody>
+          <a:bodyPr/>
+          <a:p/>
+        </p:txBody>
       </p:sp>
       <p:sp>
         <p:nvSpPr>
@@ -8554,6 +8818,10 @@
           </a:solidFill>
           <a:ln/>
         </p:spPr>
+        <p:txBody>
+          <a:bodyPr/>
+          <a:p/>
+        </p:txBody>
       </p:sp>
       <p:sp>
         <p:nvSpPr>
@@ -8574,6 +8842,10 @@
           </a:solidFill>
           <a:ln/>
         </p:spPr>
+        <p:txBody>
+          <a:bodyPr/>
+          <a:p/>
+        </p:txBody>
       </p:sp>
       <p:sp>
         <p:nvSpPr>
@@ -8672,6 +8944,10 @@
           </a:solidFill>
           <a:ln/>
         </p:spPr>
+        <p:txBody>
+          <a:bodyPr/>
+          <a:p/>
+        </p:txBody>
       </p:sp>
       <p:sp>
         <p:nvSpPr>
@@ -8692,6 +8968,10 @@
           </a:solidFill>
           <a:ln/>
         </p:spPr>
+        <p:txBody>
+          <a:bodyPr/>
+          <a:p/>
+        </p:txBody>
       </p:sp>
       <p:sp>
         <p:nvSpPr>
@@ -8822,6 +9102,10 @@
           </a:solidFill>
           <a:ln/>
         </p:spPr>
+        <p:txBody>
+          <a:bodyPr/>
+          <a:p/>
+        </p:txBody>
       </p:sp>
       <p:sp>
         <p:nvSpPr>
@@ -8881,6 +9165,10 @@
           </a:solidFill>
           <a:ln/>
         </p:spPr>
+        <p:txBody>
+          <a:bodyPr/>
+          <a:p/>
+        </p:txBody>
       </p:sp>
       <p:sp>
         <p:nvSpPr>
@@ -8940,6 +9228,10 @@
           </a:solidFill>
           <a:ln/>
         </p:spPr>
+        <p:txBody>
+          <a:bodyPr/>
+          <a:p/>
+        </p:txBody>
       </p:sp>
       <p:sp>
         <p:nvSpPr>
@@ -8960,6 +9252,10 @@
           </a:solidFill>
           <a:ln/>
         </p:spPr>
+        <p:txBody>
+          <a:bodyPr/>
+          <a:p/>
+        </p:txBody>
       </p:sp>
       <p:sp>
         <p:nvSpPr>
@@ -9058,6 +9354,10 @@
           </a:solidFill>
           <a:ln/>
         </p:spPr>
+        <p:txBody>
+          <a:bodyPr/>
+          <a:p/>
+        </p:txBody>
       </p:sp>
       <p:sp>
         <p:nvSpPr>
@@ -9078,6 +9378,10 @@
           </a:solidFill>
           <a:ln/>
         </p:spPr>
+        <p:txBody>
+          <a:bodyPr/>
+          <a:p/>
+        </p:txBody>
       </p:sp>
       <p:sp>
         <p:nvSpPr>
@@ -9176,6 +9480,10 @@
           </a:solidFill>
           <a:ln/>
         </p:spPr>
+        <p:txBody>
+          <a:bodyPr/>
+          <a:p/>
+        </p:txBody>
       </p:sp>
       <p:sp>
         <p:nvSpPr>
@@ -9196,6 +9504,10 @@
           </a:solidFill>
           <a:ln/>
         </p:spPr>
+        <p:txBody>
+          <a:bodyPr/>
+          <a:p/>
+        </p:txBody>
       </p:sp>
       <p:sp>
         <p:nvSpPr>
@@ -9294,6 +9606,10 @@
           </a:solidFill>
           <a:ln/>
         </p:spPr>
+        <p:txBody>
+          <a:bodyPr/>
+          <a:p/>
+        </p:txBody>
       </p:sp>
       <p:sp>
         <p:nvSpPr>
@@ -9314,6 +9630,10 @@
           </a:solidFill>
           <a:ln/>
         </p:spPr>
+        <p:txBody>
+          <a:bodyPr/>
+          <a:p/>
+        </p:txBody>
       </p:sp>
       <p:sp>
         <p:nvSpPr>
@@ -9412,6 +9732,10 @@
           </a:solidFill>
           <a:ln/>
         </p:spPr>
+        <p:txBody>
+          <a:bodyPr/>
+          <a:p/>
+        </p:txBody>
       </p:sp>
       <p:sp>
         <p:nvSpPr>
@@ -9432,6 +9756,10 @@
           </a:solidFill>
           <a:ln/>
         </p:spPr>
+        <p:txBody>
+          <a:bodyPr/>
+          <a:p/>
+        </p:txBody>
       </p:sp>
       <p:sp>
         <p:nvSpPr>
@@ -9530,6 +9858,10 @@
           </a:solidFill>
           <a:ln/>
         </p:spPr>
+        <p:txBody>
+          <a:bodyPr/>
+          <a:p/>
+        </p:txBody>
       </p:sp>
       <p:sp>
         <p:nvSpPr>
@@ -9589,6 +9921,10 @@
           </a:solidFill>
           <a:ln/>
         </p:spPr>
+        <p:txBody>
+          <a:bodyPr/>
+          <a:p/>
+        </p:txBody>
       </p:sp>
       <p:sp>
         <p:nvSpPr>
@@ -9609,6 +9945,10 @@
           </a:solidFill>
           <a:ln/>
         </p:spPr>
+        <p:txBody>
+          <a:bodyPr/>
+          <a:p/>
+        </p:txBody>
       </p:sp>
       <p:sp>
         <p:nvSpPr>
@@ -9707,6 +10047,10 @@
           </a:solidFill>
           <a:ln/>
         </p:spPr>
+        <p:txBody>
+          <a:bodyPr/>
+          <a:p/>
+        </p:txBody>
       </p:sp>
       <p:sp>
         <p:nvSpPr>
@@ -9727,6 +10071,10 @@
           </a:solidFill>
           <a:ln/>
         </p:spPr>
+        <p:txBody>
+          <a:bodyPr/>
+          <a:p/>
+        </p:txBody>
       </p:sp>
       <p:sp>
         <p:nvSpPr>
@@ -9825,6 +10173,10 @@
           </a:solidFill>
           <a:ln/>
         </p:spPr>
+        <p:txBody>
+          <a:bodyPr/>
+          <a:p/>
+        </p:txBody>
       </p:sp>
       <p:sp>
         <p:nvSpPr>
@@ -9845,6 +10197,10 @@
           </a:solidFill>
           <a:ln/>
         </p:spPr>
+        <p:txBody>
+          <a:bodyPr/>
+          <a:p/>
+        </p:txBody>
       </p:sp>
       <p:sp>
         <p:nvSpPr>
@@ -9943,6 +10299,10 @@
           </a:solidFill>
           <a:ln/>
         </p:spPr>
+        <p:txBody>
+          <a:bodyPr/>
+          <a:p/>
+        </p:txBody>
       </p:sp>
       <p:sp>
         <p:nvSpPr>
@@ -9963,6 +10323,10 @@
           </a:solidFill>
           <a:ln/>
         </p:spPr>
+        <p:txBody>
+          <a:bodyPr/>
+          <a:p/>
+        </p:txBody>
       </p:sp>
       <p:sp>
         <p:nvSpPr>
@@ -10061,6 +10425,10 @@
           </a:solidFill>
           <a:ln/>
         </p:spPr>
+        <p:txBody>
+          <a:bodyPr/>
+          <a:p/>
+        </p:txBody>
       </p:sp>
       <p:sp>
         <p:nvSpPr>
@@ -10081,6 +10449,10 @@
           </a:solidFill>
           <a:ln/>
         </p:spPr>
+        <p:txBody>
+          <a:bodyPr/>
+          <a:p/>
+        </p:txBody>
       </p:sp>
       <p:sp>
         <p:nvSpPr>
@@ -10179,6 +10551,10 @@
           </a:solidFill>
           <a:ln/>
         </p:spPr>
+        <p:txBody>
+          <a:bodyPr/>
+          <a:p/>
+        </p:txBody>
       </p:sp>
       <p:sp>
         <p:nvSpPr>
@@ -10238,6 +10614,10 @@
           </a:solidFill>
           <a:ln/>
         </p:spPr>
+        <p:txBody>
+          <a:bodyPr/>
+          <a:p/>
+        </p:txBody>
       </p:sp>
       <p:sp>
         <p:nvSpPr>
@@ -10258,6 +10638,10 @@
           </a:solidFill>
           <a:ln/>
         </p:spPr>
+        <p:txBody>
+          <a:bodyPr/>
+          <a:p/>
+        </p:txBody>
       </p:sp>
       <p:sp>
         <p:nvSpPr>
@@ -10356,6 +10740,10 @@
           </a:solidFill>
           <a:ln/>
         </p:spPr>
+        <p:txBody>
+          <a:bodyPr/>
+          <a:p/>
+        </p:txBody>
       </p:sp>
       <p:sp>
         <p:nvSpPr>
@@ -10376,6 +10764,10 @@
           </a:solidFill>
           <a:ln/>
         </p:spPr>
+        <p:txBody>
+          <a:bodyPr/>
+          <a:p/>
+        </p:txBody>
       </p:sp>
       <p:sp>
         <p:nvSpPr>
@@ -10474,6 +10866,10 @@
           </a:solidFill>
           <a:ln/>
         </p:spPr>
+        <p:txBody>
+          <a:bodyPr/>
+          <a:p/>
+        </p:txBody>
       </p:sp>
       <p:sp>
         <p:nvSpPr>
@@ -10494,6 +10890,10 @@
           </a:solidFill>
           <a:ln/>
         </p:spPr>
+        <p:txBody>
+          <a:bodyPr/>
+          <a:p/>
+        </p:txBody>
       </p:sp>
       <p:sp>
         <p:nvSpPr>
@@ -10592,6 +10992,10 @@
           </a:solidFill>
           <a:ln/>
         </p:spPr>
+        <p:txBody>
+          <a:bodyPr/>
+          <a:p/>
+        </p:txBody>
       </p:sp>
       <p:sp>
         <p:nvSpPr>
@@ -10612,6 +11016,10 @@
           </a:solidFill>
           <a:ln/>
         </p:spPr>
+        <p:txBody>
+          <a:bodyPr/>
+          <a:p/>
+        </p:txBody>
       </p:sp>
       <p:sp>
         <p:nvSpPr>
@@ -10710,6 +11118,10 @@
           </a:solidFill>
           <a:ln/>
         </p:spPr>
+        <p:txBody>
+          <a:bodyPr/>
+          <a:p/>
+        </p:txBody>
       </p:sp>
       <p:sp>
         <p:nvSpPr>
@@ -10730,6 +11142,10 @@
           </a:solidFill>
           <a:ln/>
         </p:spPr>
+        <p:txBody>
+          <a:bodyPr/>
+          <a:p/>
+        </p:txBody>
       </p:sp>
       <p:sp>
         <p:nvSpPr>
@@ -10828,6 +11244,10 @@
           </a:solidFill>
           <a:ln/>
         </p:spPr>
+        <p:txBody>
+          <a:bodyPr/>
+          <a:p/>
+        </p:txBody>
       </p:sp>
       <p:sp>
         <p:nvSpPr>
@@ -11664,7 +12084,7 @@
                 <a:ea typeface="Microsoft YaHei" pitchFamily="34" charset="-122"/>
                 <a:cs typeface="Microsoft YaHei" pitchFamily="34" charset="-120"/>
               </a:rPr>
-              <a:t>6个编排Orchestrator Skill + 30个原子Skill模块化设计</a:t>
+              <a:t>6个编排Orchestrator Skill + 37个原子Skill模块化设计</a:t>
             </a:r>
             <a:endParaRPr lang="en-US" sz="1000" dirty="0"/>
           </a:p>
